--- a/public/fun/cards/finance/finance-06.pptx
+++ b/public/fun/cards/finance/finance-06.pptx
@@ -3085,7 +3085,7 @@
     <p:bg>
       <p:bgPr>
         <a:solidFill>
-          <a:srgbClr val="FBF8F2"/>
+          <a:srgbClr val="E6EEFF"/>
         </a:solidFill>
         <a:effectLst/>
       </p:bgPr>
@@ -3099,157 +3099,14 @@
       <p:grpSpPr/>
       <p:sp>
         <p:nvSpPr>
-          <p:cNvPr id="2" name="Rectangle 1"/>
-          <p:cNvSpPr/>
+          <p:cNvPr id="2" name="텍스트"/>
+          <p:cNvSpPr txBox="1"/>
           <p:nvPr/>
         </p:nvSpPr>
         <p:spPr>
           <a:xfrm>
-            <a:off x="0" y="1339200"/>
-            <a:ext cx="3240000" cy="460800"/>
-          </a:xfrm>
-          <a:prstGeom prst="rect">
-            <a:avLst/>
-          </a:prstGeom>
-          <a:solidFill>
-            <a:srgbClr val="3B9142"/>
-          </a:solidFill>
-          <a:ln>
-            <a:noFill/>
-          </a:ln>
-        </p:spPr>
-        <p:txBody>
-          <a:bodyPr rtlCol="0" anchor="ctr"/>
-          <a:lstStyle/>
-          <a:p>
-            <a:pPr algn="ctr"/>
-          </a:p>
-        </p:txBody>
-      </p:sp>
-      <p:sp>
-        <p:nvSpPr>
-          <p:cNvPr id="3" name="Rounded Rectangle 2"/>
-          <p:cNvSpPr/>
-          <p:nvPr/>
-        </p:nvSpPr>
-        <p:spPr>
-          <a:xfrm>
-            <a:off x="2737440" y="455760"/>
-            <a:ext cx="79200" cy="142560"/>
-          </a:xfrm>
-          <a:prstGeom prst="roundRect">
-            <a:avLst>
-              <a:gd name="adj" fmla="val 10000"/>
-            </a:avLst>
-          </a:prstGeom>
-          <a:solidFill>
-            <a:srgbClr val="3B9142"/>
-          </a:solidFill>
-          <a:ln>
-            <a:noFill/>
-          </a:ln>
-        </p:spPr>
-        <p:txBody>
-          <a:bodyPr rtlCol="0" anchor="ctr"/>
-          <a:lstStyle/>
-          <a:p>
-            <a:pPr algn="ctr"/>
-          </a:p>
-        </p:txBody>
-      </p:sp>
-      <p:sp>
-        <p:nvSpPr>
-          <p:cNvPr id="4" name="Rounded Rectangle 3"/>
-          <p:cNvSpPr/>
-          <p:nvPr/>
-        </p:nvSpPr>
-        <p:spPr>
-          <a:xfrm>
-            <a:off x="2840400" y="376560"/>
-            <a:ext cx="79200" cy="221760"/>
-          </a:xfrm>
-          <a:prstGeom prst="roundRect">
-            <a:avLst>
-              <a:gd name="adj" fmla="val 10000"/>
-            </a:avLst>
-          </a:prstGeom>
-          <a:solidFill>
-            <a:srgbClr val="C8E0CA"/>
-          </a:solidFill>
-          <a:ln>
-            <a:noFill/>
-          </a:ln>
-        </p:spPr>
-        <p:txBody>
-          <a:bodyPr rtlCol="0" anchor="ctr"/>
-          <a:lstStyle/>
-          <a:p>
-            <a:pPr algn="ctr"/>
-          </a:p>
-        </p:txBody>
-      </p:sp>
-      <p:sp>
-        <p:nvSpPr>
-          <p:cNvPr id="5" name="Rounded Rectangle 4"/>
-          <p:cNvSpPr/>
-          <p:nvPr/>
-        </p:nvSpPr>
-        <p:spPr>
-          <a:xfrm>
-            <a:off x="2943360" y="281520"/>
-            <a:ext cx="79200" cy="316800"/>
-          </a:xfrm>
-          <a:prstGeom prst="roundRect">
-            <a:avLst>
-              <a:gd name="adj" fmla="val 10000"/>
-            </a:avLst>
-          </a:prstGeom>
-          <a:solidFill>
-            <a:srgbClr val="3B9142"/>
-          </a:solidFill>
-          <a:ln>
-            <a:noFill/>
-          </a:ln>
-        </p:spPr>
-        <p:txBody>
-          <a:bodyPr rtlCol="0" anchor="ctr"/>
-          <a:lstStyle/>
-          <a:p>
-            <a:pPr algn="ctr"/>
-          </a:p>
-        </p:txBody>
-      </p:sp>
-      <p:cxnSp>
-        <p:nvCxnSpPr>
-          <p:cNvPr id="6" name="Connector 5"/>
-          <p:cNvCxnSpPr/>
-          <p:nvPr/>
-        </p:nvCxnSpPr>
-        <p:spPr>
-          <a:xfrm>
-            <a:off x="2705760" y="614160"/>
-            <a:ext cx="348480" cy="0"/>
-          </a:xfrm>
-          <a:prstGeom prst="line">
-            <a:avLst/>
-          </a:prstGeom>
-          <a:ln w="15840">
-            <a:solidFill>
-              <a:srgbClr val="C8E0CA"/>
-            </a:solidFill>
-          </a:ln>
-        </p:spPr>
-      </p:cxnSp>
-      <p:sp>
-        <p:nvSpPr>
-          <p:cNvPr id="7" name="텍스트"/>
-          <p:cNvSpPr txBox="1"/>
-          <p:nvPr/>
-        </p:nvSpPr>
-        <p:spPr>
-          <a:xfrm>
-            <a:off x="216000" y="230400"/>
-            <a:ext cx="2160000" cy="313692"/>
+            <a:off x="252000" y="223200"/>
+            <a:ext cx="2016000" cy="133351"/>
           </a:xfrm>
           <a:prstGeom prst="rect">
             <a:avLst/>
@@ -3264,32 +3121,32 @@
           <a:p>
             <a:pPr algn="l">
               <a:lnSpc>
-                <a:spcPts val="2755"/>
+                <a:spcPts val="1015"/>
               </a:lnSpc>
             </a:pPr>
             <a:r>
-              <a:rPr sz="1900" b="1" spc="50">
+              <a:rPr sz="700" b="1" spc="200">
                 <a:solidFill>
-                  <a:srgbClr val="742F4C"/>
+                  <a:srgbClr val="0B2E72"/>
                 </a:solidFill>
                 <a:latin typeface="맑은 고딕"/>
                 <a:ea typeface="맑은 고딕"/>
               </a:rPr>
-              <a:t>강도윤</a:t>
-            </a:r>
-          </a:p>
-        </p:txBody>
-      </p:sp>
-      <p:sp>
-        <p:nvSpPr>
-          <p:cNvPr id="8" name="텍스트"/>
+              <a:t>회사 · 사무소 이름</a:t>
+            </a:r>
+          </a:p>
+        </p:txBody>
+      </p:sp>
+      <p:sp>
+        <p:nvSpPr>
+          <p:cNvPr id="3" name="텍스트"/>
           <p:cNvSpPr txBox="1"/>
           <p:nvPr/>
         </p:nvSpPr>
         <p:spPr>
           <a:xfrm>
-            <a:off x="216000" y="525600"/>
-            <a:ext cx="2160000" cy="122400"/>
+            <a:off x="252000" y="468000"/>
+            <a:ext cx="2520000" cy="360000"/>
           </a:xfrm>
           <a:prstGeom prst="rect">
             <a:avLst/>
@@ -3304,32 +3161,32 @@
           <a:p>
             <a:pPr algn="l">
               <a:lnSpc>
-                <a:spcPts val="1232"/>
+                <a:spcPts val="3190"/>
               </a:lnSpc>
             </a:pPr>
             <a:r>
-              <a:rPr sz="850" b="1">
+              <a:rPr sz="2200" b="1">
                 <a:solidFill>
-                  <a:srgbClr val="327B38"/>
+                  <a:srgbClr val="12151C"/>
                 </a:solidFill>
                 <a:latin typeface="맑은 고딕"/>
                 <a:ea typeface="맑은 고딕"/>
               </a:rPr>
-              <a:t>부동산 컨설턴트</a:t>
-            </a:r>
-          </a:p>
-        </p:txBody>
-      </p:sp>
-      <p:sp>
-        <p:nvSpPr>
-          <p:cNvPr id="9" name="텍스트"/>
+              <a:t>강도윤</a:t>
+            </a:r>
+          </a:p>
+        </p:txBody>
+      </p:sp>
+      <p:sp>
+        <p:nvSpPr>
+          <p:cNvPr id="4" name="텍스트"/>
           <p:cNvSpPr txBox="1"/>
           <p:nvPr/>
         </p:nvSpPr>
         <p:spPr>
           <a:xfrm>
-            <a:off x="216000" y="770400"/>
-            <a:ext cx="2160000" cy="100800"/>
+            <a:off x="252000" y="871200"/>
+            <a:ext cx="2520000" cy="171451"/>
           </a:xfrm>
           <a:prstGeom prst="rect">
             <a:avLst/>
@@ -3344,32 +3201,101 @@
           <a:p>
             <a:pPr algn="l">
               <a:lnSpc>
-                <a:spcPts val="1087"/>
+                <a:spcPts val="1305"/>
               </a:lnSpc>
             </a:pPr>
             <a:r>
-              <a:rPr sz="750" b="1" spc="150">
+              <a:rPr sz="900" b="0">
                 <a:solidFill>
-                  <a:srgbClr val="8B6372"/>
+                  <a:srgbClr val="0B2E72"/>
                 </a:solidFill>
                 <a:latin typeface="맑은 고딕"/>
                 <a:ea typeface="맑은 고딕"/>
               </a:rPr>
-              <a:t>회사 · 사무소 이름</a:t>
-            </a:r>
-          </a:p>
-        </p:txBody>
-      </p:sp>
-      <p:sp>
-        <p:nvSpPr>
-          <p:cNvPr id="10" name="텍스트"/>
+              <a:t>부동산 컨설턴트</a:t>
+            </a:r>
+          </a:p>
+        </p:txBody>
+      </p:sp>
+      <p:sp>
+        <p:nvSpPr>
+          <p:cNvPr id="5" name="텍스트"/>
           <p:cNvSpPr txBox="1"/>
           <p:nvPr/>
         </p:nvSpPr>
         <p:spPr>
           <a:xfrm>
-            <a:off x="216000" y="1432800"/>
-            <a:ext cx="122400" cy="108000"/>
+            <a:off x="252000" y="1216800"/>
+            <a:ext cx="2520000" cy="129541"/>
+          </a:xfrm>
+          <a:prstGeom prst="rect">
+            <a:avLst/>
+          </a:prstGeom>
+          <a:noFill/>
+        </p:spPr>
+        <p:txBody>
+          <a:bodyPr wrap="square" lIns="0" rIns="0" tIns="0" bIns="0" anchor="t">
+            <a:spAutoFit/>
+          </a:bodyPr>
+          <a:lstStyle/>
+          <a:p>
+            <a:pPr algn="l">
+              <a:lnSpc>
+                <a:spcPts val="986"/>
+              </a:lnSpc>
+            </a:pPr>
+            <a:r>
+              <a:rPr sz="680" b="0">
+                <a:solidFill>
+                  <a:srgbClr val="0B2E72"/>
+                </a:solidFill>
+                <a:latin typeface="맑은 고딕"/>
+                <a:ea typeface="맑은 고딕"/>
+              </a:rPr>
+              <a:t>주소를 입력해 주세요</a:t>
+            </a:r>
+          </a:p>
+        </p:txBody>
+      </p:sp>
+      <p:sp>
+        <p:nvSpPr>
+          <p:cNvPr id="6" name="Rectangle 5"/>
+          <p:cNvSpPr/>
+          <p:nvPr/>
+        </p:nvSpPr>
+        <p:spPr>
+          <a:xfrm>
+            <a:off x="0" y="1476000"/>
+            <a:ext cx="3240000" cy="324000"/>
+          </a:xfrm>
+          <a:prstGeom prst="rect">
+            <a:avLst/>
+          </a:prstGeom>
+          <a:solidFill>
+            <a:srgbClr val="0057FF"/>
+          </a:solidFill>
+          <a:ln>
+            <a:noFill/>
+          </a:ln>
+        </p:spPr>
+        <p:txBody>
+          <a:bodyPr rtlCol="0" anchor="ctr"/>
+          <a:lstStyle/>
+          <a:p>
+            <a:pPr algn="ctr"/>
+          </a:p>
+        </p:txBody>
+      </p:sp>
+      <p:sp>
+        <p:nvSpPr>
+          <p:cNvPr id="7" name="텍스트"/>
+          <p:cNvSpPr txBox="1"/>
+          <p:nvPr/>
+        </p:nvSpPr>
+        <p:spPr>
+          <a:xfrm>
+            <a:off x="252000" y="1569600"/>
+            <a:ext cx="1296000" cy="133351"/>
           </a:xfrm>
           <a:prstGeom prst="rect">
             <a:avLst/>
@@ -3395,61 +3321,21 @@
                 <a:latin typeface="맑은 고딕"/>
                 <a:ea typeface="맑은 고딕"/>
               </a:rPr>
-              <a:t>T</a:t>
-            </a:r>
-          </a:p>
-        </p:txBody>
-      </p:sp>
-      <p:sp>
-        <p:nvSpPr>
-          <p:cNvPr id="11" name="텍스트"/>
+              <a:t>010-1234-5678</a:t>
+            </a:r>
+          </a:p>
+        </p:txBody>
+      </p:sp>
+      <p:sp>
+        <p:nvSpPr>
+          <p:cNvPr id="8" name="텍스트"/>
           <p:cNvSpPr txBox="1"/>
           <p:nvPr/>
         </p:nvSpPr>
         <p:spPr>
           <a:xfrm>
-            <a:off x="360000" y="1432800"/>
-            <a:ext cx="1368000" cy="108000"/>
-          </a:xfrm>
-          <a:prstGeom prst="rect">
-            <a:avLst/>
-          </a:prstGeom>
-          <a:noFill/>
-        </p:spPr>
-        <p:txBody>
-          <a:bodyPr wrap="square" lIns="0" rIns="0" tIns="0" bIns="0" anchor="t">
-            <a:spAutoFit/>
-          </a:bodyPr>
-          <a:lstStyle/>
-          <a:p>
-            <a:pPr algn="l">
-              <a:lnSpc>
-                <a:spcPts val="1015"/>
-              </a:lnSpc>
-            </a:pPr>
-            <a:r>
-              <a:rPr sz="700" b="0">
-                <a:solidFill>
-                  <a:srgbClr val="FFFFFF"/>
-                </a:solidFill>
-                <a:latin typeface="맑은 고딕"/>
-                <a:ea typeface="맑은 고딕"/>
-              </a:rPr>
-              <a:t>010-1234-5678</a:t>
-            </a:r>
-          </a:p>
-        </p:txBody>
-      </p:sp>
-      <p:sp>
-        <p:nvSpPr>
-          <p:cNvPr id="12" name="텍스트"/>
-          <p:cNvSpPr txBox="1"/>
-          <p:nvPr/>
-        </p:nvSpPr>
-        <p:spPr>
-          <a:xfrm>
-            <a:off x="216000" y="1576800"/>
-            <a:ext cx="122400" cy="108000"/>
+            <a:off x="1656000" y="1569600"/>
+            <a:ext cx="1368000" cy="133351"/>
           </a:xfrm>
           <a:prstGeom prst="rect">
             <a:avLst/>
@@ -3475,127 +3361,7 @@
                 <a:latin typeface="맑은 고딕"/>
                 <a:ea typeface="맑은 고딕"/>
               </a:rPr>
-              <a:t>E</a:t>
-            </a:r>
-          </a:p>
-        </p:txBody>
-      </p:sp>
-      <p:sp>
-        <p:nvSpPr>
-          <p:cNvPr id="13" name="텍스트"/>
-          <p:cNvSpPr txBox="1"/>
-          <p:nvPr/>
-        </p:nvSpPr>
-        <p:spPr>
-          <a:xfrm>
-            <a:off x="360000" y="1576800"/>
-            <a:ext cx="1368000" cy="108000"/>
-          </a:xfrm>
-          <a:prstGeom prst="rect">
-            <a:avLst/>
-          </a:prstGeom>
-          <a:noFill/>
-        </p:spPr>
-        <p:txBody>
-          <a:bodyPr wrap="square" lIns="0" rIns="0" tIns="0" bIns="0" anchor="t">
-            <a:spAutoFit/>
-          </a:bodyPr>
-          <a:lstStyle/>
-          <a:p>
-            <a:pPr algn="l">
-              <a:lnSpc>
-                <a:spcPts val="1015"/>
-              </a:lnSpc>
-            </a:pPr>
-            <a:r>
-              <a:rPr sz="700" b="0">
-                <a:solidFill>
-                  <a:srgbClr val="FFFFFF"/>
-                </a:solidFill>
-                <a:latin typeface="맑은 고딕"/>
-                <a:ea typeface="맑은 고딕"/>
-              </a:rPr>
               <a:t>name@example.com</a:t>
-            </a:r>
-          </a:p>
-        </p:txBody>
-      </p:sp>
-      <p:sp>
-        <p:nvSpPr>
-          <p:cNvPr id="14" name="텍스트"/>
-          <p:cNvSpPr txBox="1"/>
-          <p:nvPr/>
-        </p:nvSpPr>
-        <p:spPr>
-          <a:xfrm>
-            <a:off x="1800000" y="1432800"/>
-            <a:ext cx="122400" cy="108000"/>
-          </a:xfrm>
-          <a:prstGeom prst="rect">
-            <a:avLst/>
-          </a:prstGeom>
-          <a:noFill/>
-        </p:spPr>
-        <p:txBody>
-          <a:bodyPr wrap="square" lIns="0" rIns="0" tIns="0" bIns="0" anchor="t">
-            <a:spAutoFit/>
-          </a:bodyPr>
-          <a:lstStyle/>
-          <a:p>
-            <a:pPr algn="l">
-              <a:lnSpc>
-                <a:spcPts val="1015"/>
-              </a:lnSpc>
-            </a:pPr>
-            <a:r>
-              <a:rPr sz="700" b="1">
-                <a:solidFill>
-                  <a:srgbClr val="FFFFFF"/>
-                </a:solidFill>
-                <a:latin typeface="맑은 고딕"/>
-                <a:ea typeface="맑은 고딕"/>
-              </a:rPr>
-              <a:t>A</a:t>
-            </a:r>
-          </a:p>
-        </p:txBody>
-      </p:sp>
-      <p:sp>
-        <p:nvSpPr>
-          <p:cNvPr id="15" name="텍스트"/>
-          <p:cNvSpPr txBox="1"/>
-          <p:nvPr/>
-        </p:nvSpPr>
-        <p:spPr>
-          <a:xfrm>
-            <a:off x="1944000" y="1432800"/>
-            <a:ext cx="1188000" cy="216000"/>
-          </a:xfrm>
-          <a:prstGeom prst="rect">
-            <a:avLst/>
-          </a:prstGeom>
-          <a:noFill/>
-        </p:spPr>
-        <p:txBody>
-          <a:bodyPr wrap="square" lIns="0" rIns="0" tIns="0" bIns="0" anchor="t">
-            <a:spAutoFit/>
-          </a:bodyPr>
-          <a:lstStyle/>
-          <a:p>
-            <a:pPr algn="l">
-              <a:lnSpc>
-                <a:spcPts val="1015"/>
-              </a:lnSpc>
-            </a:pPr>
-            <a:r>
-              <a:rPr sz="700" b="0">
-                <a:solidFill>
-                  <a:srgbClr val="FFFFFF"/>
-                </a:solidFill>
-                <a:latin typeface="맑은 고딕"/>
-                <a:ea typeface="맑은 고딕"/>
-              </a:rPr>
-              <a:t>주소를 입력해 주세요</a:t>
             </a:r>
           </a:p>
         </p:txBody>
@@ -3614,7 +3380,7 @@
     <p:bg>
       <p:bgPr>
         <a:solidFill>
-          <a:srgbClr val="F9F1F4"/>
+          <a:srgbClr val="0057FF"/>
         </a:solidFill>
         <a:effectLst/>
       </p:bgPr>
@@ -3634,42 +3400,11 @@
         </p:nvSpPr>
         <p:spPr>
           <a:xfrm>
-            <a:off x="0" y="0"/>
-            <a:ext cx="3240000" cy="1800000"/>
+            <a:off x="252000" y="540000"/>
+            <a:ext cx="28800" cy="720000"/>
           </a:xfrm>
           <a:prstGeom prst="rect">
             <a:avLst/>
-          </a:prstGeom>
-          <a:solidFill>
-            <a:srgbClr val="B8517C"/>
-          </a:solidFill>
-          <a:ln>
-            <a:noFill/>
-          </a:ln>
-        </p:spPr>
-        <p:txBody>
-          <a:bodyPr rtlCol="0" anchor="ctr"/>
-          <a:lstStyle/>
-          <a:p>
-            <a:pPr algn="ctr"/>
-          </a:p>
-        </p:txBody>
-      </p:sp>
-      <p:sp>
-        <p:nvSpPr>
-          <p:cNvPr id="3" name="Rounded Rectangle 2"/>
-          <p:cNvSpPr/>
-          <p:nvPr/>
-        </p:nvSpPr>
-        <p:spPr>
-          <a:xfrm>
-            <a:off x="1490400" y="561600"/>
-            <a:ext cx="72000" cy="129600"/>
-          </a:xfrm>
-          <a:prstGeom prst="roundRect">
-            <a:avLst>
-              <a:gd name="adj" fmla="val 10000"/>
-            </a:avLst>
           </a:prstGeom>
           <a:solidFill>
             <a:srgbClr val="FFFFFF"/>
@@ -3688,97 +3423,14 @@
       </p:sp>
       <p:sp>
         <p:nvSpPr>
-          <p:cNvPr id="4" name="Rounded Rectangle 3"/>
-          <p:cNvSpPr/>
+          <p:cNvPr id="3" name="텍스트"/>
+          <p:cNvSpPr txBox="1"/>
           <p:nvPr/>
         </p:nvSpPr>
         <p:spPr>
           <a:xfrm>
-            <a:off x="1584000" y="489600"/>
-            <a:ext cx="72000" cy="201600"/>
-          </a:xfrm>
-          <a:prstGeom prst="roundRect">
-            <a:avLst>
-              <a:gd name="adj" fmla="val 10000"/>
-            </a:avLst>
-          </a:prstGeom>
-          <a:solidFill>
-            <a:srgbClr val="808080"/>
-          </a:solidFill>
-          <a:ln>
-            <a:noFill/>
-          </a:ln>
-        </p:spPr>
-        <p:txBody>
-          <a:bodyPr rtlCol="0" anchor="ctr"/>
-          <a:lstStyle/>
-          <a:p>
-            <a:pPr algn="ctr"/>
-          </a:p>
-        </p:txBody>
-      </p:sp>
-      <p:sp>
-        <p:nvSpPr>
-          <p:cNvPr id="5" name="Rounded Rectangle 4"/>
-          <p:cNvSpPr/>
-          <p:nvPr/>
-        </p:nvSpPr>
-        <p:spPr>
-          <a:xfrm>
-            <a:off x="1677600" y="403200"/>
-            <a:ext cx="72000" cy="288000"/>
-          </a:xfrm>
-          <a:prstGeom prst="roundRect">
-            <a:avLst>
-              <a:gd name="adj" fmla="val 10000"/>
-            </a:avLst>
-          </a:prstGeom>
-          <a:solidFill>
-            <a:srgbClr val="FFFFFF"/>
-          </a:solidFill>
-          <a:ln>
-            <a:noFill/>
-          </a:ln>
-        </p:spPr>
-        <p:txBody>
-          <a:bodyPr rtlCol="0" anchor="ctr"/>
-          <a:lstStyle/>
-          <a:p>
-            <a:pPr algn="ctr"/>
-          </a:p>
-        </p:txBody>
-      </p:sp>
-      <p:cxnSp>
-        <p:nvCxnSpPr>
-          <p:cNvPr id="6" name="Connector 5"/>
-          <p:cNvCxnSpPr/>
-          <p:nvPr/>
-        </p:nvCxnSpPr>
-        <p:spPr>
-          <a:xfrm>
-            <a:off x="1461600" y="705600"/>
-            <a:ext cx="316800" cy="0"/>
-          </a:xfrm>
-          <a:prstGeom prst="line">
-            <a:avLst/>
-          </a:prstGeom>
-          <a:ln w="14400">
-            <a:solidFill>
-              <a:srgbClr val="808080"/>
-            </a:solidFill>
-          </a:ln>
-        </p:spPr>
-      </p:cxnSp>
-      <p:sp>
-        <p:nvSpPr>
-          <p:cNvPr id="7" name="텍스트"/>
-          <p:cNvSpPr txBox="1"/>
-          <p:nvPr/>
-        </p:nvSpPr>
-        <p:spPr>
-          <a:xfrm>
-            <a:off x="396000" y="835200"/>
-            <a:ext cx="2448000" cy="396000"/>
+            <a:off x="424800" y="612000"/>
+            <a:ext cx="2160000" cy="648000"/>
           </a:xfrm>
           <a:prstGeom prst="rect">
             <a:avLst/>
@@ -3786,39 +3438,56 @@
           <a:noFill/>
         </p:spPr>
         <p:txBody>
-          <a:bodyPr wrap="square" lIns="0" rIns="0" tIns="0" bIns="0" anchor="ctr">
+          <a:bodyPr wrap="square" lIns="0" rIns="0" tIns="0" bIns="0" anchor="t">
             <a:spAutoFit/>
           </a:bodyPr>
           <a:lstStyle/>
           <a:p>
-            <a:pPr algn="ctr">
+            <a:pPr algn="l">
               <a:lnSpc>
-                <a:spcPts val="1667"/>
+                <a:spcPts val="1812"/>
               </a:lnSpc>
             </a:pPr>
             <a:r>
-              <a:rPr sz="1150" b="1">
+              <a:rPr sz="1250" b="1">
                 <a:solidFill>
                   <a:srgbClr val="FFFFFF"/>
                 </a:solidFill>
-                <a:latin typeface="바탕"/>
-                <a:ea typeface="바탕"/>
+                <a:latin typeface="맑은 고딕"/>
+                <a:ea typeface="맑은 고딕"/>
               </a:rPr>
-              <a:t>필요한 내용만 정확히 안내합니다</a:t>
-            </a:r>
-          </a:p>
-        </p:txBody>
-      </p:sp>
-      <p:sp>
-        <p:nvSpPr>
-          <p:cNvPr id="8" name="텍스트"/>
+              <a:t>필요한 내용만</a:t>
+            </a:r>
+          </a:p>
+          <a:p>
+            <a:pPr algn="l">
+              <a:lnSpc>
+                <a:spcPts val="1812"/>
+              </a:lnSpc>
+            </a:pPr>
+            <a:r>
+              <a:rPr sz="1250" b="1">
+                <a:solidFill>
+                  <a:srgbClr val="FFFFFF"/>
+                </a:solidFill>
+                <a:latin typeface="맑은 고딕"/>
+                <a:ea typeface="맑은 고딕"/>
+              </a:rPr>
+              <a:t>정확히 안내합니다</a:t>
+            </a:r>
+          </a:p>
+        </p:txBody>
+      </p:sp>
+      <p:sp>
+        <p:nvSpPr>
+          <p:cNvPr id="4" name="텍스트"/>
           <p:cNvSpPr txBox="1"/>
           <p:nvPr/>
         </p:nvSpPr>
         <p:spPr>
           <a:xfrm>
-            <a:off x="360000" y="1476000"/>
-            <a:ext cx="2520000" cy="108000"/>
+            <a:off x="424800" y="1512000"/>
+            <a:ext cx="1800000" cy="123826"/>
           </a:xfrm>
           <a:prstGeom prst="rect">
             <a:avLst/>
@@ -3831,15 +3500,15 @@
           </a:bodyPr>
           <a:lstStyle/>
           <a:p>
-            <a:pPr algn="ctr">
+            <a:pPr algn="l">
               <a:lnSpc>
-                <a:spcPts val="1015"/>
+                <a:spcPts val="942"/>
               </a:lnSpc>
             </a:pPr>
             <a:r>
-              <a:rPr sz="700" b="1" spc="300">
+              <a:rPr sz="650" b="1" spc="200">
                 <a:solidFill>
-                  <a:srgbClr val="FFFFFF"/>
+                  <a:srgbClr val="C7DAFF"/>
                 </a:solidFill>
                 <a:latin typeface="맑은 고딕"/>
                 <a:ea typeface="맑은 고딕"/>

--- a/public/fun/cards/finance/finance-06.pptx
+++ b/public/fun/cards/finance/finance-06.pptx
@@ -3105,8 +3105,8 @@
         </p:nvSpPr>
         <p:spPr>
           <a:xfrm>
-            <a:off x="252000" y="223200"/>
-            <a:ext cx="2016000" cy="133351"/>
+            <a:off x="252000" y="252000"/>
+            <a:ext cx="1512000" cy="123826"/>
           </a:xfrm>
           <a:prstGeom prst="rect">
             <a:avLst/>
@@ -3121,11 +3121,11 @@
           <a:p>
             <a:pPr algn="l">
               <a:lnSpc>
-                <a:spcPts val="1015"/>
+                <a:spcPts val="942"/>
               </a:lnSpc>
             </a:pPr>
             <a:r>
-              <a:rPr sz="700" b="1" spc="200">
+              <a:rPr sz="650" b="1" spc="220">
                 <a:solidFill>
                   <a:srgbClr val="0B2E72"/>
                 </a:solidFill>
@@ -3137,16 +3137,37 @@
           </a:p>
         </p:txBody>
       </p:sp>
-      <p:sp>
-        <p:nvSpPr>
-          <p:cNvPr id="3" name="텍스트"/>
+      <p:cxnSp>
+        <p:nvCxnSpPr>
+          <p:cNvPr id="3" name="Connector 2"/>
+          <p:cNvCxnSpPr/>
+          <p:nvPr/>
+        </p:nvCxnSpPr>
+        <p:spPr>
+          <a:xfrm>
+            <a:off x="252000" y="388800"/>
+            <a:ext cx="2736000" cy="0"/>
+          </a:xfrm>
+          <a:prstGeom prst="line">
+            <a:avLst/>
+          </a:prstGeom>
+          <a:ln w="3600">
+            <a:solidFill>
+              <a:srgbClr val="B8D0FF"/>
+            </a:solidFill>
+          </a:ln>
+        </p:spPr>
+      </p:cxnSp>
+      <p:sp>
+        <p:nvSpPr>
+          <p:cNvPr id="4" name="텍스트"/>
           <p:cNvSpPr txBox="1"/>
           <p:nvPr/>
         </p:nvSpPr>
         <p:spPr>
           <a:xfrm>
-            <a:off x="252000" y="468000"/>
-            <a:ext cx="2520000" cy="360000"/>
+            <a:off x="252000" y="576000"/>
+            <a:ext cx="1800000" cy="237600"/>
           </a:xfrm>
           <a:prstGeom prst="rect">
             <a:avLst/>
@@ -3161,11 +3182,11 @@
           <a:p>
             <a:pPr algn="l">
               <a:lnSpc>
-                <a:spcPts val="3190"/>
+                <a:spcPts val="1957"/>
               </a:lnSpc>
             </a:pPr>
             <a:r>
-              <a:rPr sz="2200" b="1">
+              <a:rPr sz="1350" b="1" spc="120">
                 <a:solidFill>
                   <a:srgbClr val="12151C"/>
                 </a:solidFill>
@@ -3179,14 +3200,14 @@
       </p:sp>
       <p:sp>
         <p:nvSpPr>
-          <p:cNvPr id="4" name="텍스트"/>
+          <p:cNvPr id="5" name="텍스트"/>
           <p:cNvSpPr txBox="1"/>
           <p:nvPr/>
         </p:nvSpPr>
         <p:spPr>
           <a:xfrm>
-            <a:off x="252000" y="871200"/>
-            <a:ext cx="2520000" cy="171451"/>
+            <a:off x="252000" y="828000"/>
+            <a:ext cx="1800000" cy="133351"/>
           </a:xfrm>
           <a:prstGeom prst="rect">
             <a:avLst/>
@@ -3201,11 +3222,11 @@
           <a:p>
             <a:pPr algn="l">
               <a:lnSpc>
-                <a:spcPts val="1305"/>
+                <a:spcPts val="1015"/>
               </a:lnSpc>
             </a:pPr>
             <a:r>
-              <a:rPr sz="900" b="0">
+              <a:rPr sz="700" b="0" spc="60">
                 <a:solidFill>
                   <a:srgbClr val="0B2E72"/>
                 </a:solidFill>
@@ -3219,14 +3240,14 @@
       </p:sp>
       <p:sp>
         <p:nvSpPr>
-          <p:cNvPr id="5" name="텍스트"/>
+          <p:cNvPr id="6" name="텍스트"/>
           <p:cNvSpPr txBox="1"/>
           <p:nvPr/>
         </p:nvSpPr>
         <p:spPr>
           <a:xfrm>
-            <a:off x="252000" y="1216800"/>
-            <a:ext cx="2520000" cy="129541"/>
+            <a:off x="252000" y="1036800"/>
+            <a:ext cx="2520000" cy="123826"/>
           </a:xfrm>
           <a:prstGeom prst="rect">
             <a:avLst/>
@@ -3241,11 +3262,11 @@
           <a:p>
             <a:pPr algn="l">
               <a:lnSpc>
-                <a:spcPts val="986"/>
+                <a:spcPts val="942"/>
               </a:lnSpc>
             </a:pPr>
             <a:r>
-              <a:rPr sz="680" b="0">
+              <a:rPr sz="650" b="0">
                 <a:solidFill>
                   <a:srgbClr val="0B2E72"/>
                 </a:solidFill>
@@ -3259,14 +3280,14 @@
       </p:sp>
       <p:sp>
         <p:nvSpPr>
-          <p:cNvPr id="6" name="Rectangle 5"/>
+          <p:cNvPr id="7" name="Rectangle 6"/>
           <p:cNvSpPr/>
           <p:nvPr/>
         </p:nvSpPr>
         <p:spPr>
           <a:xfrm>
-            <a:off x="0" y="1476000"/>
-            <a:ext cx="3240000" cy="324000"/>
+            <a:off x="0" y="1339200"/>
+            <a:ext cx="3240000" cy="460800"/>
           </a:xfrm>
           <a:prstGeom prst="rect">
             <a:avLst/>
@@ -3288,14 +3309,14 @@
       </p:sp>
       <p:sp>
         <p:nvSpPr>
-          <p:cNvPr id="7" name="텍스트"/>
+          <p:cNvPr id="8" name="텍스트"/>
           <p:cNvSpPr txBox="1"/>
           <p:nvPr/>
         </p:nvSpPr>
         <p:spPr>
           <a:xfrm>
-            <a:off x="252000" y="1569600"/>
-            <a:ext cx="1296000" cy="133351"/>
+            <a:off x="252000" y="1476000"/>
+            <a:ext cx="936000" cy="91441"/>
           </a:xfrm>
           <a:prstGeom prst="rect">
             <a:avLst/>
@@ -3310,11 +3331,53 @@
           <a:p>
             <a:pPr algn="l">
               <a:lnSpc>
-                <a:spcPts val="1015"/>
+                <a:spcPts val="696"/>
               </a:lnSpc>
             </a:pPr>
             <a:r>
-              <a:rPr sz="700" b="1">
+              <a:rPr sz="480" b="1" spc="140">
+                <a:solidFill>
+                  <a:srgbClr val="FFFFFF">
+                    <a:alpha val="70000"/>
+                  </a:srgbClr>
+                </a:solidFill>
+                <a:latin typeface="맑은 고딕"/>
+                <a:ea typeface="맑은 고딕"/>
+              </a:rPr>
+              <a:t>TEL</a:t>
+            </a:r>
+          </a:p>
+        </p:txBody>
+      </p:sp>
+      <p:sp>
+        <p:nvSpPr>
+          <p:cNvPr id="9" name="텍스트"/>
+          <p:cNvSpPr txBox="1"/>
+          <p:nvPr/>
+        </p:nvSpPr>
+        <p:spPr>
+          <a:xfrm>
+            <a:off x="252000" y="1576800"/>
+            <a:ext cx="936000" cy="123826"/>
+          </a:xfrm>
+          <a:prstGeom prst="rect">
+            <a:avLst/>
+          </a:prstGeom>
+          <a:noFill/>
+        </p:spPr>
+        <p:txBody>
+          <a:bodyPr wrap="square" lIns="0" rIns="0" tIns="0" bIns="0" anchor="t">
+            <a:spAutoFit/>
+          </a:bodyPr>
+          <a:lstStyle/>
+          <a:p>
+            <a:pPr algn="l">
+              <a:lnSpc>
+                <a:spcPts val="942"/>
+              </a:lnSpc>
+            </a:pPr>
+            <a:r>
+              <a:rPr sz="650" b="1">
                 <a:solidFill>
                   <a:srgbClr val="FFFFFF"/>
                 </a:solidFill>
@@ -3328,14 +3391,14 @@
       </p:sp>
       <p:sp>
         <p:nvSpPr>
-          <p:cNvPr id="8" name="텍스트"/>
+          <p:cNvPr id="10" name="텍스트"/>
           <p:cNvSpPr txBox="1"/>
           <p:nvPr/>
         </p:nvSpPr>
         <p:spPr>
           <a:xfrm>
-            <a:off x="1656000" y="1569600"/>
-            <a:ext cx="1368000" cy="133351"/>
+            <a:off x="1188000" y="1476000"/>
+            <a:ext cx="1080000" cy="91441"/>
           </a:xfrm>
           <a:prstGeom prst="rect">
             <a:avLst/>
@@ -3350,11 +3413,53 @@
           <a:p>
             <a:pPr algn="l">
               <a:lnSpc>
-                <a:spcPts val="1015"/>
+                <a:spcPts val="696"/>
               </a:lnSpc>
             </a:pPr>
             <a:r>
-              <a:rPr sz="700" b="1">
+              <a:rPr sz="480" b="1" spc="140">
+                <a:solidFill>
+                  <a:srgbClr val="FFFFFF">
+                    <a:alpha val="70000"/>
+                  </a:srgbClr>
+                </a:solidFill>
+                <a:latin typeface="맑은 고딕"/>
+                <a:ea typeface="맑은 고딕"/>
+              </a:rPr>
+              <a:t>MAIL</a:t>
+            </a:r>
+          </a:p>
+        </p:txBody>
+      </p:sp>
+      <p:sp>
+        <p:nvSpPr>
+          <p:cNvPr id="11" name="텍스트"/>
+          <p:cNvSpPr txBox="1"/>
+          <p:nvPr/>
+        </p:nvSpPr>
+        <p:spPr>
+          <a:xfrm>
+            <a:off x="1188000" y="1576800"/>
+            <a:ext cx="1080000" cy="123826"/>
+          </a:xfrm>
+          <a:prstGeom prst="rect">
+            <a:avLst/>
+          </a:prstGeom>
+          <a:noFill/>
+        </p:spPr>
+        <p:txBody>
+          <a:bodyPr wrap="square" lIns="0" rIns="0" tIns="0" bIns="0" anchor="t">
+            <a:spAutoFit/>
+          </a:bodyPr>
+          <a:lstStyle/>
+          <a:p>
+            <a:pPr algn="l">
+              <a:lnSpc>
+                <a:spcPts val="942"/>
+              </a:lnSpc>
+            </a:pPr>
+            <a:r>
+              <a:rPr sz="650" b="1">
                 <a:solidFill>
                   <a:srgbClr val="FFFFFF"/>
                 </a:solidFill>
@@ -3366,6 +3471,27 @@
           </a:p>
         </p:txBody>
       </p:sp>
+      <p:cxnSp>
+        <p:nvCxnSpPr>
+          <p:cNvPr id="12" name="Connector 11"/>
+          <p:cNvCxnSpPr/>
+          <p:nvPr/>
+        </p:nvCxnSpPr>
+        <p:spPr>
+          <a:xfrm>
+            <a:off x="1108800" y="1468800"/>
+            <a:ext cx="0" cy="208800"/>
+          </a:xfrm>
+          <a:prstGeom prst="line">
+            <a:avLst/>
+          </a:prstGeom>
+          <a:ln w="3600">
+            <a:solidFill>
+              <a:srgbClr val="FFFFFF"/>
+            </a:solidFill>
+          </a:ln>
+        </p:spPr>
+      </p:cxnSp>
     </p:spTree>
   </p:cSld>
   <p:clrMapOvr>
@@ -3394,43 +3520,14 @@
       <p:grpSpPr/>
       <p:sp>
         <p:nvSpPr>
-          <p:cNvPr id="2" name="Rectangle 1"/>
-          <p:cNvSpPr/>
-          <p:nvPr/>
-        </p:nvSpPr>
-        <p:spPr>
-          <a:xfrm>
-            <a:off x="252000" y="540000"/>
-            <a:ext cx="28800" cy="720000"/>
-          </a:xfrm>
-          <a:prstGeom prst="rect">
-            <a:avLst/>
-          </a:prstGeom>
-          <a:solidFill>
-            <a:srgbClr val="FFFFFF"/>
-          </a:solidFill>
-          <a:ln>
-            <a:noFill/>
-          </a:ln>
-        </p:spPr>
-        <p:txBody>
-          <a:bodyPr rtlCol="0" anchor="ctr"/>
-          <a:lstStyle/>
-          <a:p>
-            <a:pPr algn="ctr"/>
-          </a:p>
-        </p:txBody>
-      </p:sp>
-      <p:sp>
-        <p:nvSpPr>
-          <p:cNvPr id="3" name="텍스트"/>
+          <p:cNvPr id="2" name="텍스트"/>
           <p:cNvSpPr txBox="1"/>
           <p:nvPr/>
         </p:nvSpPr>
         <p:spPr>
           <a:xfrm>
-            <a:off x="424800" y="612000"/>
-            <a:ext cx="2160000" cy="648000"/>
+            <a:off x="252000" y="223200"/>
+            <a:ext cx="1080000" cy="99061"/>
           </a:xfrm>
           <a:prstGeom prst="rect">
             <a:avLst/>
@@ -3445,49 +3542,154 @@
           <a:p>
             <a:pPr algn="l">
               <a:lnSpc>
-                <a:spcPts val="1812"/>
+                <a:spcPts val="754"/>
               </a:lnSpc>
             </a:pPr>
             <a:r>
-              <a:rPr sz="1250" b="1">
+              <a:rPr sz="520" b="1" spc="240">
+                <a:solidFill>
+                  <a:srgbClr val="C7DAFF"/>
+                </a:solidFill>
+                <a:latin typeface="맑은 고딕"/>
+                <a:ea typeface="맑은 고딕"/>
+              </a:rPr>
+              <a:t>상담 분야</a:t>
+            </a:r>
+          </a:p>
+        </p:txBody>
+      </p:sp>
+      <p:cxnSp>
+        <p:nvCxnSpPr>
+          <p:cNvPr id="3" name="Connector 2"/>
+          <p:cNvCxnSpPr/>
+          <p:nvPr/>
+        </p:nvCxnSpPr>
+        <p:spPr>
+          <a:xfrm>
+            <a:off x="252000" y="388800"/>
+            <a:ext cx="2736000" cy="0"/>
+          </a:xfrm>
+          <a:prstGeom prst="line">
+            <a:avLst/>
+          </a:prstGeom>
+          <a:ln w="3600">
+            <a:solidFill>
+              <a:srgbClr val="669AFF"/>
+            </a:solidFill>
+          </a:ln>
+        </p:spPr>
+      </p:cxnSp>
+      <p:sp>
+        <p:nvSpPr>
+          <p:cNvPr id="4" name="텍스트"/>
+          <p:cNvSpPr txBox="1"/>
+          <p:nvPr/>
+        </p:nvSpPr>
+        <p:spPr>
+          <a:xfrm>
+            <a:off x="252000" y="468000"/>
+            <a:ext cx="216000" cy="99061"/>
+          </a:xfrm>
+          <a:prstGeom prst="rect">
+            <a:avLst/>
+          </a:prstGeom>
+          <a:noFill/>
+        </p:spPr>
+        <p:txBody>
+          <a:bodyPr wrap="square" lIns="0" rIns="0" tIns="0" bIns="0" anchor="t">
+            <a:spAutoFit/>
+          </a:bodyPr>
+          <a:lstStyle/>
+          <a:p>
+            <a:pPr algn="l">
+              <a:lnSpc>
+                <a:spcPts val="754"/>
+              </a:lnSpc>
+            </a:pPr>
+            <a:r>
+              <a:rPr sz="520" b="1" spc="100">
                 <a:solidFill>
                   <a:srgbClr val="FFFFFF"/>
                 </a:solidFill>
                 <a:latin typeface="맑은 고딕"/>
                 <a:ea typeface="맑은 고딕"/>
               </a:rPr>
-              <a:t>필요한 내용만</a:t>
-            </a:r>
-          </a:p>
+              <a:t>01</a:t>
+            </a:r>
+          </a:p>
+        </p:txBody>
+      </p:sp>
+      <p:sp>
+        <p:nvSpPr>
+          <p:cNvPr id="5" name="텍스트"/>
+          <p:cNvSpPr txBox="1"/>
+          <p:nvPr/>
+        </p:nvSpPr>
+        <p:spPr>
+          <a:xfrm>
+            <a:off x="475200" y="457200"/>
+            <a:ext cx="1152000" cy="140971"/>
+          </a:xfrm>
+          <a:prstGeom prst="rect">
+            <a:avLst/>
+          </a:prstGeom>
+          <a:noFill/>
+        </p:spPr>
+        <p:txBody>
+          <a:bodyPr wrap="square" lIns="0" rIns="0" tIns="0" bIns="0" anchor="t">
+            <a:spAutoFit/>
+          </a:bodyPr>
+          <a:lstStyle/>
           <a:p>
             <a:pPr algn="l">
               <a:lnSpc>
-                <a:spcPts val="1812"/>
+                <a:spcPts val="1073"/>
               </a:lnSpc>
             </a:pPr>
             <a:r>
-              <a:rPr sz="1250" b="1">
+              <a:rPr sz="740" b="0">
                 <a:solidFill>
                   <a:srgbClr val="FFFFFF"/>
                 </a:solidFill>
                 <a:latin typeface="맑은 고딕"/>
                 <a:ea typeface="맑은 고딕"/>
               </a:rPr>
-              <a:t>정확히 안내합니다</a:t>
-            </a:r>
-          </a:p>
-        </p:txBody>
-      </p:sp>
-      <p:sp>
-        <p:nvSpPr>
-          <p:cNvPr id="4" name="텍스트"/>
+              <a:t>자산 관리</a:t>
+            </a:r>
+          </a:p>
+        </p:txBody>
+      </p:sp>
+      <p:cxnSp>
+        <p:nvCxnSpPr>
+          <p:cNvPr id="6" name="Connector 5"/>
+          <p:cNvCxnSpPr/>
+          <p:nvPr/>
+        </p:nvCxnSpPr>
+        <p:spPr>
+          <a:xfrm>
+            <a:off x="252000" y="691200"/>
+            <a:ext cx="1296000" cy="0"/>
+          </a:xfrm>
+          <a:prstGeom prst="line">
+            <a:avLst/>
+          </a:prstGeom>
+          <a:ln w="3600">
+            <a:solidFill>
+              <a:srgbClr val="669AFF"/>
+            </a:solidFill>
+          </a:ln>
+        </p:spPr>
+      </p:cxnSp>
+      <p:sp>
+        <p:nvSpPr>
+          <p:cNvPr id="7" name="텍스트"/>
           <p:cNvSpPr txBox="1"/>
           <p:nvPr/>
         </p:nvSpPr>
         <p:spPr>
           <a:xfrm>
-            <a:off x="424800" y="1512000"/>
-            <a:ext cx="1800000" cy="123826"/>
+            <a:off x="1656000" y="468000"/>
+            <a:ext cx="216000" cy="99061"/>
           </a:xfrm>
           <a:prstGeom prst="rect">
             <a:avLst/>
@@ -3502,18 +3704,361 @@
           <a:p>
             <a:pPr algn="l">
               <a:lnSpc>
-                <a:spcPts val="942"/>
+                <a:spcPts val="754"/>
               </a:lnSpc>
             </a:pPr>
             <a:r>
-              <a:rPr sz="650" b="1" spc="200">
+              <a:rPr sz="520" b="1" spc="100">
+                <a:solidFill>
+                  <a:srgbClr val="FFFFFF"/>
+                </a:solidFill>
+                <a:latin typeface="맑은 고딕"/>
+                <a:ea typeface="맑은 고딕"/>
+              </a:rPr>
+              <a:t>02</a:t>
+            </a:r>
+          </a:p>
+        </p:txBody>
+      </p:sp>
+      <p:sp>
+        <p:nvSpPr>
+          <p:cNvPr id="8" name="텍스트"/>
+          <p:cNvSpPr txBox="1"/>
+          <p:nvPr/>
+        </p:nvSpPr>
+        <p:spPr>
+          <a:xfrm>
+            <a:off x="1879200" y="457200"/>
+            <a:ext cx="1152000" cy="140971"/>
+          </a:xfrm>
+          <a:prstGeom prst="rect">
+            <a:avLst/>
+          </a:prstGeom>
+          <a:noFill/>
+        </p:spPr>
+        <p:txBody>
+          <a:bodyPr wrap="square" lIns="0" rIns="0" tIns="0" bIns="0" anchor="t">
+            <a:spAutoFit/>
+          </a:bodyPr>
+          <a:lstStyle/>
+          <a:p>
+            <a:pPr algn="l">
+              <a:lnSpc>
+                <a:spcPts val="1073"/>
+              </a:lnSpc>
+            </a:pPr>
+            <a:r>
+              <a:rPr sz="740" b="0">
+                <a:solidFill>
+                  <a:srgbClr val="FFFFFF"/>
+                </a:solidFill>
+                <a:latin typeface="맑은 고딕"/>
+                <a:ea typeface="맑은 고딕"/>
+              </a:rPr>
+              <a:t>세무 상담</a:t>
+            </a:r>
+          </a:p>
+        </p:txBody>
+      </p:sp>
+      <p:cxnSp>
+        <p:nvCxnSpPr>
+          <p:cNvPr id="9" name="Connector 8"/>
+          <p:cNvCxnSpPr/>
+          <p:nvPr/>
+        </p:nvCxnSpPr>
+        <p:spPr>
+          <a:xfrm>
+            <a:off x="1656000" y="691200"/>
+            <a:ext cx="1296000" cy="0"/>
+          </a:xfrm>
+          <a:prstGeom prst="line">
+            <a:avLst/>
+          </a:prstGeom>
+          <a:ln w="3600">
+            <a:solidFill>
+              <a:srgbClr val="669AFF"/>
+            </a:solidFill>
+          </a:ln>
+        </p:spPr>
+      </p:cxnSp>
+      <p:sp>
+        <p:nvSpPr>
+          <p:cNvPr id="10" name="텍스트"/>
+          <p:cNvSpPr txBox="1"/>
+          <p:nvPr/>
+        </p:nvSpPr>
+        <p:spPr>
+          <a:xfrm>
+            <a:off x="252000" y="813600"/>
+            <a:ext cx="216000" cy="99061"/>
+          </a:xfrm>
+          <a:prstGeom prst="rect">
+            <a:avLst/>
+          </a:prstGeom>
+          <a:noFill/>
+        </p:spPr>
+        <p:txBody>
+          <a:bodyPr wrap="square" lIns="0" rIns="0" tIns="0" bIns="0" anchor="t">
+            <a:spAutoFit/>
+          </a:bodyPr>
+          <a:lstStyle/>
+          <a:p>
+            <a:pPr algn="l">
+              <a:lnSpc>
+                <a:spcPts val="754"/>
+              </a:lnSpc>
+            </a:pPr>
+            <a:r>
+              <a:rPr sz="520" b="1" spc="100">
+                <a:solidFill>
+                  <a:srgbClr val="FFFFFF"/>
+                </a:solidFill>
+                <a:latin typeface="맑은 고딕"/>
+                <a:ea typeface="맑은 고딕"/>
+              </a:rPr>
+              <a:t>03</a:t>
+            </a:r>
+          </a:p>
+        </p:txBody>
+      </p:sp>
+      <p:sp>
+        <p:nvSpPr>
+          <p:cNvPr id="11" name="텍스트"/>
+          <p:cNvSpPr txBox="1"/>
+          <p:nvPr/>
+        </p:nvSpPr>
+        <p:spPr>
+          <a:xfrm>
+            <a:off x="475200" y="802800"/>
+            <a:ext cx="1152000" cy="140971"/>
+          </a:xfrm>
+          <a:prstGeom prst="rect">
+            <a:avLst/>
+          </a:prstGeom>
+          <a:noFill/>
+        </p:spPr>
+        <p:txBody>
+          <a:bodyPr wrap="square" lIns="0" rIns="0" tIns="0" bIns="0" anchor="t">
+            <a:spAutoFit/>
+          </a:bodyPr>
+          <a:lstStyle/>
+          <a:p>
+            <a:pPr algn="l">
+              <a:lnSpc>
+                <a:spcPts val="1073"/>
+              </a:lnSpc>
+            </a:pPr>
+            <a:r>
+              <a:rPr sz="740" b="0">
+                <a:solidFill>
+                  <a:srgbClr val="FFFFFF"/>
+                </a:solidFill>
+                <a:latin typeface="맑은 고딕"/>
+                <a:ea typeface="맑은 고딕"/>
+              </a:rPr>
+              <a:t>사업자 상담</a:t>
+            </a:r>
+          </a:p>
+        </p:txBody>
+      </p:sp>
+      <p:cxnSp>
+        <p:nvCxnSpPr>
+          <p:cNvPr id="12" name="Connector 11"/>
+          <p:cNvCxnSpPr/>
+          <p:nvPr/>
+        </p:nvCxnSpPr>
+        <p:spPr>
+          <a:xfrm>
+            <a:off x="252000" y="1036800"/>
+            <a:ext cx="1296000" cy="0"/>
+          </a:xfrm>
+          <a:prstGeom prst="line">
+            <a:avLst/>
+          </a:prstGeom>
+          <a:ln w="3600">
+            <a:solidFill>
+              <a:srgbClr val="669AFF"/>
+            </a:solidFill>
+          </a:ln>
+        </p:spPr>
+      </p:cxnSp>
+      <p:sp>
+        <p:nvSpPr>
+          <p:cNvPr id="13" name="텍스트"/>
+          <p:cNvSpPr txBox="1"/>
+          <p:nvPr/>
+        </p:nvSpPr>
+        <p:spPr>
+          <a:xfrm>
+            <a:off x="1656000" y="813600"/>
+            <a:ext cx="216000" cy="99061"/>
+          </a:xfrm>
+          <a:prstGeom prst="rect">
+            <a:avLst/>
+          </a:prstGeom>
+          <a:noFill/>
+        </p:spPr>
+        <p:txBody>
+          <a:bodyPr wrap="square" lIns="0" rIns="0" tIns="0" bIns="0" anchor="t">
+            <a:spAutoFit/>
+          </a:bodyPr>
+          <a:lstStyle/>
+          <a:p>
+            <a:pPr algn="l">
+              <a:lnSpc>
+                <a:spcPts val="754"/>
+              </a:lnSpc>
+            </a:pPr>
+            <a:r>
+              <a:rPr sz="520" b="1" spc="100">
+                <a:solidFill>
+                  <a:srgbClr val="FFFFFF"/>
+                </a:solidFill>
+                <a:latin typeface="맑은 고딕"/>
+                <a:ea typeface="맑은 고딕"/>
+              </a:rPr>
+              <a:t>04</a:t>
+            </a:r>
+          </a:p>
+        </p:txBody>
+      </p:sp>
+      <p:sp>
+        <p:nvSpPr>
+          <p:cNvPr id="14" name="텍스트"/>
+          <p:cNvSpPr txBox="1"/>
+          <p:nvPr/>
+        </p:nvSpPr>
+        <p:spPr>
+          <a:xfrm>
+            <a:off x="1879200" y="802800"/>
+            <a:ext cx="1152000" cy="140971"/>
+          </a:xfrm>
+          <a:prstGeom prst="rect">
+            <a:avLst/>
+          </a:prstGeom>
+          <a:noFill/>
+        </p:spPr>
+        <p:txBody>
+          <a:bodyPr wrap="square" lIns="0" rIns="0" tIns="0" bIns="0" anchor="t">
+            <a:spAutoFit/>
+          </a:bodyPr>
+          <a:lstStyle/>
+          <a:p>
+            <a:pPr algn="l">
+              <a:lnSpc>
+                <a:spcPts val="1073"/>
+              </a:lnSpc>
+            </a:pPr>
+            <a:r>
+              <a:rPr sz="740" b="0">
+                <a:solidFill>
+                  <a:srgbClr val="FFFFFF"/>
+                </a:solidFill>
+                <a:latin typeface="맑은 고딕"/>
+                <a:ea typeface="맑은 고딕"/>
+              </a:rPr>
+              <a:t>증권 정리</a:t>
+            </a:r>
+          </a:p>
+        </p:txBody>
+      </p:sp>
+      <p:cxnSp>
+        <p:nvCxnSpPr>
+          <p:cNvPr id="15" name="Connector 14"/>
+          <p:cNvCxnSpPr/>
+          <p:nvPr/>
+        </p:nvCxnSpPr>
+        <p:spPr>
+          <a:xfrm>
+            <a:off x="1656000" y="1036800"/>
+            <a:ext cx="1296000" cy="0"/>
+          </a:xfrm>
+          <a:prstGeom prst="line">
+            <a:avLst/>
+          </a:prstGeom>
+          <a:ln w="3600">
+            <a:solidFill>
+              <a:srgbClr val="669AFF"/>
+            </a:solidFill>
+          </a:ln>
+        </p:spPr>
+      </p:cxnSp>
+      <p:sp>
+        <p:nvSpPr>
+          <p:cNvPr id="16" name="텍스트"/>
+          <p:cNvSpPr txBox="1"/>
+          <p:nvPr/>
+        </p:nvSpPr>
+        <p:spPr>
+          <a:xfrm>
+            <a:off x="252000" y="1569600"/>
+            <a:ext cx="1368000" cy="114301"/>
+          </a:xfrm>
+          <a:prstGeom prst="rect">
+            <a:avLst/>
+          </a:prstGeom>
+          <a:noFill/>
+        </p:spPr>
+        <p:txBody>
+          <a:bodyPr wrap="square" lIns="0" rIns="0" tIns="0" bIns="0" anchor="t">
+            <a:spAutoFit/>
+          </a:bodyPr>
+          <a:lstStyle/>
+          <a:p>
+            <a:pPr algn="l">
+              <a:lnSpc>
+                <a:spcPts val="869"/>
+              </a:lnSpc>
+            </a:pPr>
+            <a:r>
+              <a:rPr sz="600" b="0">
                 <a:solidFill>
                   <a:srgbClr val="C7DAFF"/>
                 </a:solidFill>
                 <a:latin typeface="맑은 고딕"/>
                 <a:ea typeface="맑은 고딕"/>
               </a:rPr>
-              <a:t>회사 · 사무소 이름</a:t>
+              <a:t>평일 10:00 – 19:00</a:t>
+            </a:r>
+          </a:p>
+        </p:txBody>
+      </p:sp>
+      <p:sp>
+        <p:nvSpPr>
+          <p:cNvPr id="17" name="텍스트"/>
+          <p:cNvSpPr txBox="1"/>
+          <p:nvPr/>
+        </p:nvSpPr>
+        <p:spPr>
+          <a:xfrm>
+            <a:off x="1620000" y="1569600"/>
+            <a:ext cx="1368000" cy="114301"/>
+          </a:xfrm>
+          <a:prstGeom prst="rect">
+            <a:avLst/>
+          </a:prstGeom>
+          <a:noFill/>
+        </p:spPr>
+        <p:txBody>
+          <a:bodyPr wrap="square" lIns="0" rIns="0" tIns="0" bIns="0" anchor="t">
+            <a:spAutoFit/>
+          </a:bodyPr>
+          <a:lstStyle/>
+          <a:p>
+            <a:pPr algn="r">
+              <a:lnSpc>
+                <a:spcPts val="869"/>
+              </a:lnSpc>
+            </a:pPr>
+            <a:r>
+              <a:rPr sz="600" b="0">
+                <a:solidFill>
+                  <a:srgbClr val="C7DAFF"/>
+                </a:solidFill>
+                <a:latin typeface="맑은 고딕"/>
+                <a:ea typeface="맑은 고딕"/>
+              </a:rPr>
+              <a:t>www.example.com</a:t>
             </a:r>
           </a:p>
         </p:txBody>
